--- a/public/fun/pack/pptx/familypro/가족소개프리미엄_29_나혼자·1인가구_코냑크림.pptx
+++ b/public/fun/pack/pptx/familypro/가족소개프리미엄_29_나혼자·1인가구_코냑크림.pptx
@@ -113,12 +113,12 @@
   <p:extLst>
     <p:ext uri="{521415D9-36F7-43E2-AB2F-B90AF26B5E84}">
       <p14:sectionLst xmlns:p14="http://schemas.microsoft.com/office/powerpoint/2010/main">
-        <p14:section name="시작" id="{0B5AD817-5276-4518-8856-3A871A915DB0}">
+        <p14:section name="시작" id="{E4A1894C-2E58-4EAB-B9DA-55754912FD2A}">
           <p14:sldIdLst>
             <p14:sldId id="256"/>
           </p14:sldIdLst>
         </p14:section>
-        <p14:section name="본문" id="{2F730141-D663-4BFE-86E3-CB3A9FE3C3AF}">
+        <p14:section name="본문" id="{3A7A7F88-B0AF-4861-A442-EC7975349C55}">
           <p14:sldIdLst>
             <p14:sldId id="257"/>
             <p14:sldId id="258"/>
@@ -127,7 +127,7 @@
             <p14:sldId id="261"/>
           </p14:sldIdLst>
         </p14:section>
-        <p14:section name="마무리" id="{363A01FD-F7CF-4047-9F63-9C8EA3AC6891}">
+        <p14:section name="마무리" id="{7176C1DA-9DEF-4B27-B8F0-1917B8CFCC2D}">
           <p14:sldIdLst>
             <p14:sldId id="262"/>
           </p14:sldIdLst>
@@ -1616,7 +1616,7 @@
             </a:lvl1pPr>
           </a:lstStyle>
           <a:p>
-            <a:fld id="{24DA5A88-4CDC-429C-8A4A-ED933A73C8FB}" type="slidenum">
+            <a:fld id="{59F092B9-65CD-4F81-8431-BA3F03631E5D}" type="slidenum">
               <a:rPr lang="en-US"/>
               <a:t>‹#›</a:t>
             </a:fld>
@@ -2694,7 +2694,7 @@
             </a:lvl1pPr>
           </a:lstStyle>
           <a:p>
-            <a:fld id="{C217D4EF-B8C2-4D30-A717-37B1BF1A0E54}" type="slidenum">
+            <a:fld id="{A3450999-5A29-43AA-BAF3-8B829B685CC2}" type="slidenum">
               <a:rPr lang="en-US"/>
               <a:t>‹#›</a:t>
             </a:fld>
@@ -3704,7 +3704,7 @@
             </a:lvl1pPr>
           </a:lstStyle>
           <a:p>
-            <a:fld id="{8B209BD9-2E13-4AB9-9535-D0E4AA2B0481}" type="slidenum">
+            <a:fld id="{0D107756-9676-43B3-995A-C0D8DCC0E664}" type="slidenum">
               <a:rPr lang="en-US"/>
               <a:t>‹#›</a:t>
             </a:fld>
@@ -4867,7 +4867,7 @@
           <a:p>
             <a:r>
               <a:rPr lang="ko-KR"/>
-              <a:t>나 혼자 · 1인 가구 · 0000. 00. 00</a:t>
+              <a:t>나 혼자 · 1인 가구 · 날짜 입력</a:t>
             </a:r>
           </a:p>
         </p:txBody>
@@ -5159,7 +5159,7 @@
           <a:bodyPr/>
           <a:lstStyle/>
           <a:p>
-            <a:fld id="{45EDD36D-F40E-4244-98C9-7C9688B126E8}" type="slidenum">
+            <a:fld id="{A790404E-5DAA-4A2B-8C83-F36676D2E811}" type="slidenum">
               <a:rPr lang="en-US"/>
               <a:t>‹#›</a:t>
             </a:fld>
@@ -5718,7 +5718,7 @@
           <a:bodyPr/>
           <a:lstStyle/>
           <a:p>
-            <a:fld id="{4A06DE17-A8C2-4BA2-8236-82B970B7A1F1}" type="slidenum">
+            <a:fld id="{24B6DE3D-230F-4F4E-A828-2EF0030A8830}" type="slidenum">
               <a:rPr lang="en-US"/>
               <a:t>‹#›</a:t>
             </a:fld>
@@ -6560,7 +6560,7 @@
           <a:bodyPr/>
           <a:lstStyle/>
           <a:p>
-            <a:fld id="{C397F5C9-625B-4CB3-A198-D1F51A0AC1DB}" type="slidenum">
+            <a:fld id="{A75E9569-3874-4235-96A6-D840DE4B693E}" type="slidenum">
               <a:rPr lang="en-US"/>
               <a:t>‹#›</a:t>
             </a:fld>
@@ -7824,7 +7824,7 @@
           <a:bodyPr/>
           <a:lstStyle/>
           <a:p>
-            <a:fld id="{82F562FD-D2EF-4F02-AE2F-EB3DCCFC1259}" type="slidenum">
+            <a:fld id="{C6F1C441-8FD3-4088-9F91-BAAB6DF69454}" type="slidenum">
               <a:rPr lang="en-US"/>
               <a:t>‹#›</a:t>
             </a:fld>
@@ -7912,7 +7912,7 @@
           <a:bodyPr/>
           <a:lstStyle/>
           <a:p>
-            <a:fld id="{A379A536-0903-4ED7-98C7-CBB703E82C1D}" type="slidenum">
+            <a:fld id="{15593247-CDCE-4627-90CC-5A10C6A669EC}" type="slidenum">
               <a:rPr lang="en-US"/>
               <a:t>‹#›</a:t>
             </a:fld>
